--- a/Mapped Curriculum Lessons/Grade 7/Lesson 27 - School Fair Prize Draw/School Fair Prize Draw - Slides.pptx
+++ b/Mapped Curriculum Lessons/Grade 7/Lesson 27 - School Fair Prize Draw/School Fair Prize Draw - Slides.pptx
@@ -2,24 +2,24 @@
 <file path=ppt/presentation.xml><?xml version="1.0" encoding="utf-8"?>
 <p:presentation xmlns:p="http://schemas.openxmlformats.org/presentationml/2006/main" embedTrueTypeFonts="1" saveSubsetFonts="0">
   <p:sldMasterIdLst>
-    <p:sldMasterId xmlns:r="http://schemas.openxmlformats.org/officeDocument/2006/relationships" id="2147483648" r:id="R692c71016dc34e2e"/>
+    <p:sldMasterId xmlns:r="http://schemas.openxmlformats.org/officeDocument/2006/relationships" id="2147483648" r:id="R08485b9f637b4063"/>
   </p:sldMasterIdLst>
   <p:notesMasterIdLst>
-    <p:notesMasterId xmlns:r="http://schemas.openxmlformats.org/officeDocument/2006/relationships" r:id="R028d68b1e1c04f55"/>
+    <p:notesMasterId xmlns:r="http://schemas.openxmlformats.org/officeDocument/2006/relationships" r:id="R11e0c8625a954e1f"/>
   </p:notesMasterIdLst>
   <p:sldIdLst>
-    <p:sldId xmlns:r="http://schemas.openxmlformats.org/officeDocument/2006/relationships" id="256" r:id="Re7f9d2ca57e94d96"/>
-    <p:sldId xmlns:r="http://schemas.openxmlformats.org/officeDocument/2006/relationships" id="257" r:id="R7c6cc1b94d244046"/>
-    <p:sldId xmlns:r="http://schemas.openxmlformats.org/officeDocument/2006/relationships" id="258" r:id="Rdbeb1eb57bd74074"/>
-    <p:sldId xmlns:r="http://schemas.openxmlformats.org/officeDocument/2006/relationships" id="259" r:id="R34c6b6aa944d4325"/>
-    <p:sldId xmlns:r="http://schemas.openxmlformats.org/officeDocument/2006/relationships" id="260" r:id="Ra1a54e93af1c43b6"/>
+    <p:sldId xmlns:r="http://schemas.openxmlformats.org/officeDocument/2006/relationships" id="256" r:id="Rd30d6ce5b57d428f"/>
+    <p:sldId xmlns:r="http://schemas.openxmlformats.org/officeDocument/2006/relationships" id="257" r:id="R7d5b45cca36947c6"/>
+    <p:sldId xmlns:r="http://schemas.openxmlformats.org/officeDocument/2006/relationships" id="258" r:id="R379ae51fd4b840bf"/>
+    <p:sldId xmlns:r="http://schemas.openxmlformats.org/officeDocument/2006/relationships" id="259" r:id="Rcc3c683eb1364cf2"/>
+    <p:sldId xmlns:r="http://schemas.openxmlformats.org/officeDocument/2006/relationships" id="260" r:id="Rd32b854585724dea"/>
   </p:sldIdLst>
   <p:sldSz cx="12192000" cy="6858000"/>
   <p:notesSz cx="6858000" cy="9144000"/>
   <p:embeddedFontLst>
     <p:embeddedFont>
       <p:font typeface="JetBrains Mono"/>
-      <p:regular xmlns:r="http://schemas.openxmlformats.org/officeDocument/2006/relationships" r:id="R78cdfb8e8a354674"/>
+      <p:regular xmlns:r="http://schemas.openxmlformats.org/officeDocument/2006/relationships" r:id="R9057ef40b903475c"/>
     </p:embeddedFont>
   </p:embeddedFontLst>
 </p:presentation>
@@ -1052,7 +1052,7 @@
           <p:nvPr/>
         </p:nvPicPr>
         <p:blipFill rotWithShape="1">
-          <a:blip xmlns:r="http://schemas.openxmlformats.org/officeDocument/2006/relationships" xmlns:a="http://schemas.openxmlformats.org/drawingml/2006/main" r:embed="Rc818312f6f4a4ef2"/>
+          <a:blip xmlns:r="http://schemas.openxmlformats.org/officeDocument/2006/relationships" xmlns:a="http://schemas.openxmlformats.org/drawingml/2006/main" r:embed="R0aa78aca2d9944ec"/>
           <a:srcRect xmlns:a="http://schemas.openxmlformats.org/drawingml/2006/main" l="0" t="0" r="0" b="0"/>
           <a:stretch xmlns:a="http://schemas.openxmlformats.org/drawingml/2006/main">
             <a:fillRect l="0" t="0" r="0" b="0"/>
@@ -1256,7 +1256,7 @@
           <p:nvPr/>
         </p:nvPicPr>
         <p:blipFill rotWithShape="1">
-          <a:blip xmlns:r="http://schemas.openxmlformats.org/officeDocument/2006/relationships" xmlns:a="http://schemas.openxmlformats.org/drawingml/2006/main" r:embed="R01f23949062e415e">
+          <a:blip xmlns:r="http://schemas.openxmlformats.org/officeDocument/2006/relationships" xmlns:a="http://schemas.openxmlformats.org/drawingml/2006/main" r:embed="R5379862c9d604587">
             <a:alphaModFix amt="28000"/>
           </a:blip>
           <a:stretch xmlns:a="http://schemas.openxmlformats.org/drawingml/2006/main"/>
@@ -1469,7 +1469,7 @@
           <p:nvPr/>
         </p:nvPicPr>
         <p:blipFill rotWithShape="1">
-          <a:blip xmlns:r="http://schemas.openxmlformats.org/officeDocument/2006/relationships" xmlns:a="http://schemas.openxmlformats.org/drawingml/2006/main" r:embed="Rbca56c94ba894856">
+          <a:blip xmlns:r="http://schemas.openxmlformats.org/officeDocument/2006/relationships" xmlns:a="http://schemas.openxmlformats.org/drawingml/2006/main" r:embed="Rc6eb1cc3a4ee4d96">
             <a:alphaModFix amt="28000"/>
           </a:blip>
           <a:stretch xmlns:a="http://schemas.openxmlformats.org/drawingml/2006/main"/>
@@ -1704,7 +1704,7 @@
           <p:nvPr/>
         </p:nvPicPr>
         <p:blipFill rotWithShape="1">
-          <a:blip xmlns:r="http://schemas.openxmlformats.org/officeDocument/2006/relationships" xmlns:a="http://schemas.openxmlformats.org/drawingml/2006/main" r:embed="Rb03404361206411a">
+          <a:blip xmlns:r="http://schemas.openxmlformats.org/officeDocument/2006/relationships" xmlns:a="http://schemas.openxmlformats.org/drawingml/2006/main" r:embed="Rc37774f7241e4630">
             <a:alphaModFix amt="28000"/>
           </a:blip>
           <a:srcRect xmlns:a="http://schemas.openxmlformats.org/drawingml/2006/main" l="0" t="0" r="0" b="0"/>
@@ -1984,7 +1984,7 @@
           <p:nvPr/>
         </p:nvPicPr>
         <p:blipFill rotWithShape="1">
-          <a:blip xmlns:r="http://schemas.openxmlformats.org/officeDocument/2006/relationships" xmlns:a="http://schemas.openxmlformats.org/drawingml/2006/main" r:embed="Rdde3bbe0ae4f493c">
+          <a:blip xmlns:r="http://schemas.openxmlformats.org/officeDocument/2006/relationships" xmlns:a="http://schemas.openxmlformats.org/drawingml/2006/main" r:embed="Re38f966321a0414b">
             <a:alphaModFix amt="28000"/>
           </a:blip>
           <a:stretch xmlns:a="http://schemas.openxmlformats.org/drawingml/2006/main"/>
@@ -2259,7 +2259,7 @@
           <p:nvPr/>
         </p:nvPicPr>
         <p:blipFill rotWithShape="1">
-          <a:blip xmlns:r="http://schemas.openxmlformats.org/officeDocument/2006/relationships" xmlns:a="http://schemas.openxmlformats.org/drawingml/2006/main" r:embed="R846473078a5b466d">
+          <a:blip xmlns:r="http://schemas.openxmlformats.org/officeDocument/2006/relationships" xmlns:a="http://schemas.openxmlformats.org/drawingml/2006/main" r:embed="R364d9723b20d40dd">
             <a:alphaModFix amt="28000"/>
           </a:blip>
           <a:stretch xmlns:a="http://schemas.openxmlformats.org/drawingml/2006/main"/>
@@ -2683,7 +2683,7 @@
           <p:nvPr/>
         </p:nvPicPr>
         <p:blipFill rotWithShape="1">
-          <a:blip xmlns:r="http://schemas.openxmlformats.org/officeDocument/2006/relationships" xmlns:a="http://schemas.openxmlformats.org/drawingml/2006/main" r:embed="R1f1f3b8753284326">
+          <a:blip xmlns:r="http://schemas.openxmlformats.org/officeDocument/2006/relationships" xmlns:a="http://schemas.openxmlformats.org/drawingml/2006/main" r:embed="R74f7a2da1b03457c">
             <a:alphaModFix amt="28000"/>
           </a:blip>
           <a:stretch xmlns:a="http://schemas.openxmlformats.org/drawingml/2006/main"/>
@@ -2824,7 +2824,7 @@
           <p:nvPr/>
         </p:nvPicPr>
         <p:blipFill rotWithShape="1">
-          <a:blip xmlns:r="http://schemas.openxmlformats.org/officeDocument/2006/relationships" xmlns:a="http://schemas.openxmlformats.org/drawingml/2006/main" r:embed="R1b432a5a1ca94c5d">
+          <a:blip xmlns:r="http://schemas.openxmlformats.org/officeDocument/2006/relationships" xmlns:a="http://schemas.openxmlformats.org/drawingml/2006/main" r:embed="R496c8cbfeb5849bc">
             <a:alphaModFix amt="28000"/>
           </a:blip>
           <a:stretch xmlns:a="http://schemas.openxmlformats.org/drawingml/2006/main"/>
@@ -2938,7 +2938,7 @@
           <p:nvPr/>
         </p:nvPicPr>
         <p:blipFill rotWithShape="1">
-          <a:blip xmlns:r="http://schemas.openxmlformats.org/officeDocument/2006/relationships" xmlns:a="http://schemas.openxmlformats.org/drawingml/2006/main" r:embed="R3022a97e4c9b4a49">
+          <a:blip xmlns:r="http://schemas.openxmlformats.org/officeDocument/2006/relationships" xmlns:a="http://schemas.openxmlformats.org/drawingml/2006/main" r:embed="R8104c233e30d42e0">
             <a:alphaModFix amt="28000"/>
           </a:blip>
           <a:stretch xmlns:a="http://schemas.openxmlformats.org/drawingml/2006/main"/>
@@ -3265,7 +3265,7 @@
           <p:nvPr/>
         </p:nvPicPr>
         <p:blipFill rotWithShape="1">
-          <a:blip xmlns:r="http://schemas.openxmlformats.org/officeDocument/2006/relationships" xmlns:a="http://schemas.openxmlformats.org/drawingml/2006/main" r:embed="R7641e6805e3444a2">
+          <a:blip xmlns:r="http://schemas.openxmlformats.org/officeDocument/2006/relationships" xmlns:a="http://schemas.openxmlformats.org/drawingml/2006/main" r:embed="Rfb318835be1c4c28">
             <a:alphaModFix amt="28000"/>
           </a:blip>
           <a:stretch xmlns:a="http://schemas.openxmlformats.org/drawingml/2006/main"/>
@@ -3553,7 +3553,7 @@
           <p:nvPr/>
         </p:nvPicPr>
         <p:blipFill rotWithShape="1">
-          <a:blip xmlns:r="http://schemas.openxmlformats.org/officeDocument/2006/relationships" xmlns:a="http://schemas.openxmlformats.org/drawingml/2006/main" r:embed="R8d6fb6e247294914">
+          <a:blip xmlns:r="http://schemas.openxmlformats.org/officeDocument/2006/relationships" xmlns:a="http://schemas.openxmlformats.org/drawingml/2006/main" r:embed="Re1f5c494904143db">
             <a:alphaModFix amt="28000"/>
           </a:blip>
           <a:stretch xmlns:a="http://schemas.openxmlformats.org/drawingml/2006/main"/>
@@ -3790,17 +3790,17 @@
   </p:cSld>
   <p:clrMap bg1="lt1" tx1="dk1" bg2="lt2" tx2="dk2" accent1="accent1" accent2="accent2" accent3="accent3" accent4="accent4" accent5="accent5" accent6="accent6" hlink="hlink" folHlink="folHlink"/>
   <p:sldLayoutIdLst>
-    <p:sldLayoutId xmlns:r="http://schemas.openxmlformats.org/officeDocument/2006/relationships" id="2147483649" r:id="Re30fd994b43a46d2"/>
-    <p:sldLayoutId xmlns:r="http://schemas.openxmlformats.org/officeDocument/2006/relationships" id="2147483650" r:id="R3e32d20848884045"/>
-    <p:sldLayoutId xmlns:r="http://schemas.openxmlformats.org/officeDocument/2006/relationships" id="2147483651" r:id="R66c7193bf1a44bfa"/>
-    <p:sldLayoutId xmlns:r="http://schemas.openxmlformats.org/officeDocument/2006/relationships" id="2147483652" r:id="R94192bd763414f7b"/>
-    <p:sldLayoutId xmlns:r="http://schemas.openxmlformats.org/officeDocument/2006/relationships" id="2147483653" r:id="R5aac4fdbb26a40d6"/>
-    <p:sldLayoutId xmlns:r="http://schemas.openxmlformats.org/officeDocument/2006/relationships" id="2147483654" r:id="Ra837be09be594e1d"/>
-    <p:sldLayoutId xmlns:r="http://schemas.openxmlformats.org/officeDocument/2006/relationships" id="2147483655" r:id="R5dbe28eef98d4926"/>
-    <p:sldLayoutId xmlns:r="http://schemas.openxmlformats.org/officeDocument/2006/relationships" id="2147483656" r:id="R2975c427708b4c9f"/>
-    <p:sldLayoutId xmlns:r="http://schemas.openxmlformats.org/officeDocument/2006/relationships" id="2147483657" r:id="Raec7988b422346b8"/>
-    <p:sldLayoutId xmlns:r="http://schemas.openxmlformats.org/officeDocument/2006/relationships" id="2147483658" r:id="R378542d38f8b4109"/>
-    <p:sldLayoutId xmlns:r="http://schemas.openxmlformats.org/officeDocument/2006/relationships" id="2147483659" r:id="Red8a26d354f243b9"/>
+    <p:sldLayoutId xmlns:r="http://schemas.openxmlformats.org/officeDocument/2006/relationships" id="2147483649" r:id="R5d95c52e706b4569"/>
+    <p:sldLayoutId xmlns:r="http://schemas.openxmlformats.org/officeDocument/2006/relationships" id="2147483650" r:id="Rd64bdd228e4a4675"/>
+    <p:sldLayoutId xmlns:r="http://schemas.openxmlformats.org/officeDocument/2006/relationships" id="2147483651" r:id="R84574a677d11443b"/>
+    <p:sldLayoutId xmlns:r="http://schemas.openxmlformats.org/officeDocument/2006/relationships" id="2147483652" r:id="Rac700d148a37433d"/>
+    <p:sldLayoutId xmlns:r="http://schemas.openxmlformats.org/officeDocument/2006/relationships" id="2147483653" r:id="Rec882126cf4f40be"/>
+    <p:sldLayoutId xmlns:r="http://schemas.openxmlformats.org/officeDocument/2006/relationships" id="2147483654" r:id="R2926ba36abb94ec2"/>
+    <p:sldLayoutId xmlns:r="http://schemas.openxmlformats.org/officeDocument/2006/relationships" id="2147483655" r:id="R44fa2f29b0c64a65"/>
+    <p:sldLayoutId xmlns:r="http://schemas.openxmlformats.org/officeDocument/2006/relationships" id="2147483656" r:id="R80479bce99ac461c"/>
+    <p:sldLayoutId xmlns:r="http://schemas.openxmlformats.org/officeDocument/2006/relationships" id="2147483657" r:id="R88377d490274403c"/>
+    <p:sldLayoutId xmlns:r="http://schemas.openxmlformats.org/officeDocument/2006/relationships" id="2147483658" r:id="R7c1afabd4a07415d"/>
+    <p:sldLayoutId xmlns:r="http://schemas.openxmlformats.org/officeDocument/2006/relationships" id="2147483659" r:id="Ra700130f6b634aaf"/>
   </p:sldLayoutIdLst>
   <p:hf hdr="0" ftr="0" dt="0"/>
   <p:txStyles>
@@ -5037,7 +5037,7 @@
             <a:r>
               <a:rPr sz="1550" b="0">
                 <a:solidFill>
-                  <a:srgbClr val="1750EB"/>
+                  <a:srgbClr val="C45E00"/>
                 </a:solidFill>
                 <a:latin typeface="JetBrains Mono"/>
                 <a:ea typeface="JetBrains Mono"/>
@@ -5921,7 +5921,7 @@
             <a:r>
               <a:rPr sz="1550" b="0">
                 <a:solidFill>
-                  <a:srgbClr val="1750EB"/>
+                  <a:srgbClr val="C45E00"/>
                 </a:solidFill>
                 <a:latin typeface="JetBrains Mono"/>
                 <a:ea typeface="JetBrains Mono"/>
@@ -5987,7 +5987,7 @@
             <a:r>
               <a:rPr sz="1550" b="0">
                 <a:solidFill>
-                  <a:srgbClr val="1750EB"/>
+                  <a:srgbClr val="C45E00"/>
                 </a:solidFill>
                 <a:latin typeface="JetBrains Mono"/>
                 <a:ea typeface="JetBrains Mono"/>
@@ -6072,7 +6072,7 @@
             <a:r>
               <a:rPr sz="1550" b="0">
                 <a:solidFill>
-                  <a:srgbClr val="1750EB"/>
+                  <a:srgbClr val="C45E00"/>
                 </a:solidFill>
                 <a:latin typeface="JetBrains Mono"/>
                 <a:ea typeface="JetBrains Mono"/>
@@ -6179,7 +6179,7 @@
             <a:r>
               <a:rPr sz="1550" b="0">
                 <a:solidFill>
-                  <a:srgbClr val="1750EB"/>
+                  <a:srgbClr val="C45E00"/>
                 </a:solidFill>
                 <a:latin typeface="JetBrains Mono"/>
                 <a:ea typeface="JetBrains Mono"/>
@@ -6226,7 +6226,7 @@
             <a:r>
               <a:rPr sz="1550" b="0">
                 <a:solidFill>
-                  <a:srgbClr val="1750EB"/>
+                  <a:srgbClr val="C45E00"/>
                 </a:solidFill>
                 <a:latin typeface="JetBrains Mono"/>
                 <a:ea typeface="JetBrains Mono"/>

--- a/Mapped Curriculum Lessons/Grade 7/Lesson 27 - School Fair Prize Draw/School Fair Prize Draw - Slides.pptx
+++ b/Mapped Curriculum Lessons/Grade 7/Lesson 27 - School Fair Prize Draw/School Fair Prize Draw - Slides.pptx
@@ -2,24 +2,24 @@
 <file path=ppt/presentation.xml><?xml version="1.0" encoding="utf-8"?>
 <p:presentation xmlns:p="http://schemas.openxmlformats.org/presentationml/2006/main" embedTrueTypeFonts="1" saveSubsetFonts="0">
   <p:sldMasterIdLst>
-    <p:sldMasterId xmlns:r="http://schemas.openxmlformats.org/officeDocument/2006/relationships" id="2147483648" r:id="R08485b9f637b4063"/>
+    <p:sldMasterId xmlns:r="http://schemas.openxmlformats.org/officeDocument/2006/relationships" id="2147483648" r:id="Rf02c413efdde4752"/>
   </p:sldMasterIdLst>
   <p:notesMasterIdLst>
-    <p:notesMasterId xmlns:r="http://schemas.openxmlformats.org/officeDocument/2006/relationships" r:id="R11e0c8625a954e1f"/>
+    <p:notesMasterId xmlns:r="http://schemas.openxmlformats.org/officeDocument/2006/relationships" r:id="Rfbe0e78257404ffa"/>
   </p:notesMasterIdLst>
   <p:sldIdLst>
-    <p:sldId xmlns:r="http://schemas.openxmlformats.org/officeDocument/2006/relationships" id="256" r:id="Rd30d6ce5b57d428f"/>
-    <p:sldId xmlns:r="http://schemas.openxmlformats.org/officeDocument/2006/relationships" id="257" r:id="R7d5b45cca36947c6"/>
-    <p:sldId xmlns:r="http://schemas.openxmlformats.org/officeDocument/2006/relationships" id="258" r:id="R379ae51fd4b840bf"/>
-    <p:sldId xmlns:r="http://schemas.openxmlformats.org/officeDocument/2006/relationships" id="259" r:id="Rcc3c683eb1364cf2"/>
-    <p:sldId xmlns:r="http://schemas.openxmlformats.org/officeDocument/2006/relationships" id="260" r:id="Rd32b854585724dea"/>
+    <p:sldId xmlns:r="http://schemas.openxmlformats.org/officeDocument/2006/relationships" id="256" r:id="R41c3200208844594"/>
+    <p:sldId xmlns:r="http://schemas.openxmlformats.org/officeDocument/2006/relationships" id="257" r:id="R5b7d182efeca4274"/>
+    <p:sldId xmlns:r="http://schemas.openxmlformats.org/officeDocument/2006/relationships" id="258" r:id="R613a26bba27b40ba"/>
+    <p:sldId xmlns:r="http://schemas.openxmlformats.org/officeDocument/2006/relationships" id="259" r:id="R4ced5a798d8c4505"/>
+    <p:sldId xmlns:r="http://schemas.openxmlformats.org/officeDocument/2006/relationships" id="260" r:id="R4983d3f437674971"/>
   </p:sldIdLst>
   <p:sldSz cx="12192000" cy="6858000"/>
   <p:notesSz cx="6858000" cy="9144000"/>
   <p:embeddedFontLst>
     <p:embeddedFont>
       <p:font typeface="JetBrains Mono"/>
-      <p:regular xmlns:r="http://schemas.openxmlformats.org/officeDocument/2006/relationships" r:id="R9057ef40b903475c"/>
+      <p:regular xmlns:r="http://schemas.openxmlformats.org/officeDocument/2006/relationships" r:id="Re009f95f82e2438b"/>
     </p:embeddedFont>
   </p:embeddedFontLst>
 </p:presentation>
@@ -1052,7 +1052,7 @@
           <p:nvPr/>
         </p:nvPicPr>
         <p:blipFill rotWithShape="1">
-          <a:blip xmlns:r="http://schemas.openxmlformats.org/officeDocument/2006/relationships" xmlns:a="http://schemas.openxmlformats.org/drawingml/2006/main" r:embed="R0aa78aca2d9944ec"/>
+          <a:blip xmlns:r="http://schemas.openxmlformats.org/officeDocument/2006/relationships" xmlns:a="http://schemas.openxmlformats.org/drawingml/2006/main" r:embed="R3cdbb4ab2e234756"/>
           <a:srcRect xmlns:a="http://schemas.openxmlformats.org/drawingml/2006/main" l="0" t="0" r="0" b="0"/>
           <a:stretch xmlns:a="http://schemas.openxmlformats.org/drawingml/2006/main">
             <a:fillRect l="0" t="0" r="0" b="0"/>
@@ -1256,7 +1256,7 @@
           <p:nvPr/>
         </p:nvPicPr>
         <p:blipFill rotWithShape="1">
-          <a:blip xmlns:r="http://schemas.openxmlformats.org/officeDocument/2006/relationships" xmlns:a="http://schemas.openxmlformats.org/drawingml/2006/main" r:embed="R5379862c9d604587">
+          <a:blip xmlns:r="http://schemas.openxmlformats.org/officeDocument/2006/relationships" xmlns:a="http://schemas.openxmlformats.org/drawingml/2006/main" r:embed="R52027638a69e4cd7">
             <a:alphaModFix amt="28000"/>
           </a:blip>
           <a:stretch xmlns:a="http://schemas.openxmlformats.org/drawingml/2006/main"/>
@@ -1469,7 +1469,7 @@
           <p:nvPr/>
         </p:nvPicPr>
         <p:blipFill rotWithShape="1">
-          <a:blip xmlns:r="http://schemas.openxmlformats.org/officeDocument/2006/relationships" xmlns:a="http://schemas.openxmlformats.org/drawingml/2006/main" r:embed="Rc6eb1cc3a4ee4d96">
+          <a:blip xmlns:r="http://schemas.openxmlformats.org/officeDocument/2006/relationships" xmlns:a="http://schemas.openxmlformats.org/drawingml/2006/main" r:embed="R01dfe5d11f8b4e6f">
             <a:alphaModFix amt="28000"/>
           </a:blip>
           <a:stretch xmlns:a="http://schemas.openxmlformats.org/drawingml/2006/main"/>
@@ -1704,7 +1704,7 @@
           <p:nvPr/>
         </p:nvPicPr>
         <p:blipFill rotWithShape="1">
-          <a:blip xmlns:r="http://schemas.openxmlformats.org/officeDocument/2006/relationships" xmlns:a="http://schemas.openxmlformats.org/drawingml/2006/main" r:embed="Rc37774f7241e4630">
+          <a:blip xmlns:r="http://schemas.openxmlformats.org/officeDocument/2006/relationships" xmlns:a="http://schemas.openxmlformats.org/drawingml/2006/main" r:embed="Raf7c51a1dcba4065">
             <a:alphaModFix amt="28000"/>
           </a:blip>
           <a:srcRect xmlns:a="http://schemas.openxmlformats.org/drawingml/2006/main" l="0" t="0" r="0" b="0"/>
@@ -1984,7 +1984,7 @@
           <p:nvPr/>
         </p:nvPicPr>
         <p:blipFill rotWithShape="1">
-          <a:blip xmlns:r="http://schemas.openxmlformats.org/officeDocument/2006/relationships" xmlns:a="http://schemas.openxmlformats.org/drawingml/2006/main" r:embed="Re38f966321a0414b">
+          <a:blip xmlns:r="http://schemas.openxmlformats.org/officeDocument/2006/relationships" xmlns:a="http://schemas.openxmlformats.org/drawingml/2006/main" r:embed="R519ca9d6705e4dfc">
             <a:alphaModFix amt="28000"/>
           </a:blip>
           <a:stretch xmlns:a="http://schemas.openxmlformats.org/drawingml/2006/main"/>
@@ -2259,7 +2259,7 @@
           <p:nvPr/>
         </p:nvPicPr>
         <p:blipFill rotWithShape="1">
-          <a:blip xmlns:r="http://schemas.openxmlformats.org/officeDocument/2006/relationships" xmlns:a="http://schemas.openxmlformats.org/drawingml/2006/main" r:embed="R364d9723b20d40dd">
+          <a:blip xmlns:r="http://schemas.openxmlformats.org/officeDocument/2006/relationships" xmlns:a="http://schemas.openxmlformats.org/drawingml/2006/main" r:embed="Rce3d8b1bf0b54804">
             <a:alphaModFix amt="28000"/>
           </a:blip>
           <a:stretch xmlns:a="http://schemas.openxmlformats.org/drawingml/2006/main"/>
@@ -2683,7 +2683,7 @@
           <p:nvPr/>
         </p:nvPicPr>
         <p:blipFill rotWithShape="1">
-          <a:blip xmlns:r="http://schemas.openxmlformats.org/officeDocument/2006/relationships" xmlns:a="http://schemas.openxmlformats.org/drawingml/2006/main" r:embed="R74f7a2da1b03457c">
+          <a:blip xmlns:r="http://schemas.openxmlformats.org/officeDocument/2006/relationships" xmlns:a="http://schemas.openxmlformats.org/drawingml/2006/main" r:embed="Rbcd2b197a34e4f06">
             <a:alphaModFix amt="28000"/>
           </a:blip>
           <a:stretch xmlns:a="http://schemas.openxmlformats.org/drawingml/2006/main"/>
@@ -2824,7 +2824,7 @@
           <p:nvPr/>
         </p:nvPicPr>
         <p:blipFill rotWithShape="1">
-          <a:blip xmlns:r="http://schemas.openxmlformats.org/officeDocument/2006/relationships" xmlns:a="http://schemas.openxmlformats.org/drawingml/2006/main" r:embed="R496c8cbfeb5849bc">
+          <a:blip xmlns:r="http://schemas.openxmlformats.org/officeDocument/2006/relationships" xmlns:a="http://schemas.openxmlformats.org/drawingml/2006/main" r:embed="Rfd13408e81c74b27">
             <a:alphaModFix amt="28000"/>
           </a:blip>
           <a:stretch xmlns:a="http://schemas.openxmlformats.org/drawingml/2006/main"/>
@@ -2938,7 +2938,7 @@
           <p:nvPr/>
         </p:nvPicPr>
         <p:blipFill rotWithShape="1">
-          <a:blip xmlns:r="http://schemas.openxmlformats.org/officeDocument/2006/relationships" xmlns:a="http://schemas.openxmlformats.org/drawingml/2006/main" r:embed="R8104c233e30d42e0">
+          <a:blip xmlns:r="http://schemas.openxmlformats.org/officeDocument/2006/relationships" xmlns:a="http://schemas.openxmlformats.org/drawingml/2006/main" r:embed="Rcaebe8edcba44ed3">
             <a:alphaModFix amt="28000"/>
           </a:blip>
           <a:stretch xmlns:a="http://schemas.openxmlformats.org/drawingml/2006/main"/>
@@ -3265,7 +3265,7 @@
           <p:nvPr/>
         </p:nvPicPr>
         <p:blipFill rotWithShape="1">
-          <a:blip xmlns:r="http://schemas.openxmlformats.org/officeDocument/2006/relationships" xmlns:a="http://schemas.openxmlformats.org/drawingml/2006/main" r:embed="Rfb318835be1c4c28">
+          <a:blip xmlns:r="http://schemas.openxmlformats.org/officeDocument/2006/relationships" xmlns:a="http://schemas.openxmlformats.org/drawingml/2006/main" r:embed="R7763d272ac8d4670">
             <a:alphaModFix amt="28000"/>
           </a:blip>
           <a:stretch xmlns:a="http://schemas.openxmlformats.org/drawingml/2006/main"/>
@@ -3553,7 +3553,7 @@
           <p:nvPr/>
         </p:nvPicPr>
         <p:blipFill rotWithShape="1">
-          <a:blip xmlns:r="http://schemas.openxmlformats.org/officeDocument/2006/relationships" xmlns:a="http://schemas.openxmlformats.org/drawingml/2006/main" r:embed="Re1f5c494904143db">
+          <a:blip xmlns:r="http://schemas.openxmlformats.org/officeDocument/2006/relationships" xmlns:a="http://schemas.openxmlformats.org/drawingml/2006/main" r:embed="R9792e5414daf4654">
             <a:alphaModFix amt="28000"/>
           </a:blip>
           <a:stretch xmlns:a="http://schemas.openxmlformats.org/drawingml/2006/main"/>
@@ -3790,17 +3790,17 @@
   </p:cSld>
   <p:clrMap bg1="lt1" tx1="dk1" bg2="lt2" tx2="dk2" accent1="accent1" accent2="accent2" accent3="accent3" accent4="accent4" accent5="accent5" accent6="accent6" hlink="hlink" folHlink="folHlink"/>
   <p:sldLayoutIdLst>
-    <p:sldLayoutId xmlns:r="http://schemas.openxmlformats.org/officeDocument/2006/relationships" id="2147483649" r:id="R5d95c52e706b4569"/>
-    <p:sldLayoutId xmlns:r="http://schemas.openxmlformats.org/officeDocument/2006/relationships" id="2147483650" r:id="Rd64bdd228e4a4675"/>
-    <p:sldLayoutId xmlns:r="http://schemas.openxmlformats.org/officeDocument/2006/relationships" id="2147483651" r:id="R84574a677d11443b"/>
-    <p:sldLayoutId xmlns:r="http://schemas.openxmlformats.org/officeDocument/2006/relationships" id="2147483652" r:id="Rac700d148a37433d"/>
-    <p:sldLayoutId xmlns:r="http://schemas.openxmlformats.org/officeDocument/2006/relationships" id="2147483653" r:id="Rec882126cf4f40be"/>
-    <p:sldLayoutId xmlns:r="http://schemas.openxmlformats.org/officeDocument/2006/relationships" id="2147483654" r:id="R2926ba36abb94ec2"/>
-    <p:sldLayoutId xmlns:r="http://schemas.openxmlformats.org/officeDocument/2006/relationships" id="2147483655" r:id="R44fa2f29b0c64a65"/>
-    <p:sldLayoutId xmlns:r="http://schemas.openxmlformats.org/officeDocument/2006/relationships" id="2147483656" r:id="R80479bce99ac461c"/>
-    <p:sldLayoutId xmlns:r="http://schemas.openxmlformats.org/officeDocument/2006/relationships" id="2147483657" r:id="R88377d490274403c"/>
-    <p:sldLayoutId xmlns:r="http://schemas.openxmlformats.org/officeDocument/2006/relationships" id="2147483658" r:id="R7c1afabd4a07415d"/>
-    <p:sldLayoutId xmlns:r="http://schemas.openxmlformats.org/officeDocument/2006/relationships" id="2147483659" r:id="Ra700130f6b634aaf"/>
+    <p:sldLayoutId xmlns:r="http://schemas.openxmlformats.org/officeDocument/2006/relationships" id="2147483649" r:id="R7702c1a9db154e35"/>
+    <p:sldLayoutId xmlns:r="http://schemas.openxmlformats.org/officeDocument/2006/relationships" id="2147483650" r:id="Rb7d1f52177bd4130"/>
+    <p:sldLayoutId xmlns:r="http://schemas.openxmlformats.org/officeDocument/2006/relationships" id="2147483651" r:id="R46be25d57f2543bb"/>
+    <p:sldLayoutId xmlns:r="http://schemas.openxmlformats.org/officeDocument/2006/relationships" id="2147483652" r:id="R3988c9f6bc7640a0"/>
+    <p:sldLayoutId xmlns:r="http://schemas.openxmlformats.org/officeDocument/2006/relationships" id="2147483653" r:id="Rdd71ebde8b7f471d"/>
+    <p:sldLayoutId xmlns:r="http://schemas.openxmlformats.org/officeDocument/2006/relationships" id="2147483654" r:id="R405ac17232654719"/>
+    <p:sldLayoutId xmlns:r="http://schemas.openxmlformats.org/officeDocument/2006/relationships" id="2147483655" r:id="R335b705fa4124f9e"/>
+    <p:sldLayoutId xmlns:r="http://schemas.openxmlformats.org/officeDocument/2006/relationships" id="2147483656" r:id="R03689fe7b0e74413"/>
+    <p:sldLayoutId xmlns:r="http://schemas.openxmlformats.org/officeDocument/2006/relationships" id="2147483657" r:id="R7f31d07205ea4e94"/>
+    <p:sldLayoutId xmlns:r="http://schemas.openxmlformats.org/officeDocument/2006/relationships" id="2147483658" r:id="Re347855d59074637"/>
+    <p:sldLayoutId xmlns:r="http://schemas.openxmlformats.org/officeDocument/2006/relationships" id="2147483659" r:id="Rf0ac240eeeba4c3e"/>
   </p:sldLayoutIdLst>
   <p:hf hdr="0" ftr="0" dt="0"/>
   <p:txStyles>
@@ -6221,29 +6221,7 @@
                 <a:ea typeface="Calibri"/>
                 <a:cs typeface="Calibri"/>
               </a:rPr>
-              <a:t>. For anything </a:t>
-            </a:r>
-            <a:r>
-              <a:rPr sz="1550" b="0">
-                <a:solidFill>
-                  <a:srgbClr val="C45E00"/>
-                </a:solidFill>
-                <a:latin typeface="JetBrains Mono"/>
-                <a:ea typeface="JetBrains Mono"/>
-                <a:cs typeface="JetBrains Mono"/>
-              </a:rPr>
-              <a:t>else</a:t>
-            </a:r>
-            <a:r>
-              <a:rPr sz="1800" b="0">
-                <a:solidFill>
-                  <a:srgbClr val="080808"/>
-                </a:solidFill>
-                <a:latin typeface="Calibri"/>
-                <a:ea typeface="Calibri"/>
-                <a:cs typeface="Calibri"/>
-              </a:rPr>
-              <a:t>, display </a:t>
+              <a:t>. For anything else, display </a:t>
             </a:r>
             <a:r>
               <a:rPr sz="1550" b="0">

--- a/Mapped Curriculum Lessons/Grade 7/Lesson 27 - School Fair Prize Draw/School Fair Prize Draw - Slides.pptx
+++ b/Mapped Curriculum Lessons/Grade 7/Lesson 27 - School Fair Prize Draw/School Fair Prize Draw - Slides.pptx
@@ -2,24 +2,24 @@
 <file path=ppt/presentation.xml><?xml version="1.0" encoding="utf-8"?>
 <p:presentation xmlns:p="http://schemas.openxmlformats.org/presentationml/2006/main" embedTrueTypeFonts="1" saveSubsetFonts="0">
   <p:sldMasterIdLst>
-    <p:sldMasterId xmlns:r="http://schemas.openxmlformats.org/officeDocument/2006/relationships" id="2147483648" r:id="Rf02c413efdde4752"/>
+    <p:sldMasterId xmlns:r="http://schemas.openxmlformats.org/officeDocument/2006/relationships" id="2147483648" r:id="R51bb987818814880"/>
   </p:sldMasterIdLst>
   <p:notesMasterIdLst>
-    <p:notesMasterId xmlns:r="http://schemas.openxmlformats.org/officeDocument/2006/relationships" r:id="Rfbe0e78257404ffa"/>
+    <p:notesMasterId xmlns:r="http://schemas.openxmlformats.org/officeDocument/2006/relationships" r:id="Rb7cdada0b90b48e0"/>
   </p:notesMasterIdLst>
   <p:sldIdLst>
-    <p:sldId xmlns:r="http://schemas.openxmlformats.org/officeDocument/2006/relationships" id="256" r:id="R41c3200208844594"/>
-    <p:sldId xmlns:r="http://schemas.openxmlformats.org/officeDocument/2006/relationships" id="257" r:id="R5b7d182efeca4274"/>
-    <p:sldId xmlns:r="http://schemas.openxmlformats.org/officeDocument/2006/relationships" id="258" r:id="R613a26bba27b40ba"/>
-    <p:sldId xmlns:r="http://schemas.openxmlformats.org/officeDocument/2006/relationships" id="259" r:id="R4ced5a798d8c4505"/>
-    <p:sldId xmlns:r="http://schemas.openxmlformats.org/officeDocument/2006/relationships" id="260" r:id="R4983d3f437674971"/>
+    <p:sldId xmlns:r="http://schemas.openxmlformats.org/officeDocument/2006/relationships" id="256" r:id="Rd00db85f8a064a61"/>
+    <p:sldId xmlns:r="http://schemas.openxmlformats.org/officeDocument/2006/relationships" id="257" r:id="R99e63e7c8cc3487d"/>
+    <p:sldId xmlns:r="http://schemas.openxmlformats.org/officeDocument/2006/relationships" id="258" r:id="R3427e87c7f944ec8"/>
+    <p:sldId xmlns:r="http://schemas.openxmlformats.org/officeDocument/2006/relationships" id="259" r:id="R127eef936da54aa1"/>
+    <p:sldId xmlns:r="http://schemas.openxmlformats.org/officeDocument/2006/relationships" id="260" r:id="R8d77e63e59914e01"/>
   </p:sldIdLst>
   <p:sldSz cx="12192000" cy="6858000"/>
   <p:notesSz cx="6858000" cy="9144000"/>
   <p:embeddedFontLst>
     <p:embeddedFont>
       <p:font typeface="JetBrains Mono"/>
-      <p:regular xmlns:r="http://schemas.openxmlformats.org/officeDocument/2006/relationships" r:id="Re009f95f82e2438b"/>
+      <p:regular xmlns:r="http://schemas.openxmlformats.org/officeDocument/2006/relationships" r:id="Rf4ab5e1959a34c75"/>
     </p:embeddedFont>
   </p:embeddedFontLst>
 </p:presentation>
@@ -1052,7 +1052,7 @@
           <p:nvPr/>
         </p:nvPicPr>
         <p:blipFill rotWithShape="1">
-          <a:blip xmlns:r="http://schemas.openxmlformats.org/officeDocument/2006/relationships" xmlns:a="http://schemas.openxmlformats.org/drawingml/2006/main" r:embed="R3cdbb4ab2e234756"/>
+          <a:blip xmlns:r="http://schemas.openxmlformats.org/officeDocument/2006/relationships" xmlns:a="http://schemas.openxmlformats.org/drawingml/2006/main" r:embed="Re4e876762776453c"/>
           <a:srcRect xmlns:a="http://schemas.openxmlformats.org/drawingml/2006/main" l="0" t="0" r="0" b="0"/>
           <a:stretch xmlns:a="http://schemas.openxmlformats.org/drawingml/2006/main">
             <a:fillRect l="0" t="0" r="0" b="0"/>
@@ -1256,7 +1256,7 @@
           <p:nvPr/>
         </p:nvPicPr>
         <p:blipFill rotWithShape="1">
-          <a:blip xmlns:r="http://schemas.openxmlformats.org/officeDocument/2006/relationships" xmlns:a="http://schemas.openxmlformats.org/drawingml/2006/main" r:embed="R52027638a69e4cd7">
+          <a:blip xmlns:r="http://schemas.openxmlformats.org/officeDocument/2006/relationships" xmlns:a="http://schemas.openxmlformats.org/drawingml/2006/main" r:embed="R9a4e8f115f60465c">
             <a:alphaModFix amt="28000"/>
           </a:blip>
           <a:stretch xmlns:a="http://schemas.openxmlformats.org/drawingml/2006/main"/>
@@ -1469,7 +1469,7 @@
           <p:nvPr/>
         </p:nvPicPr>
         <p:blipFill rotWithShape="1">
-          <a:blip xmlns:r="http://schemas.openxmlformats.org/officeDocument/2006/relationships" xmlns:a="http://schemas.openxmlformats.org/drawingml/2006/main" r:embed="R01dfe5d11f8b4e6f">
+          <a:blip xmlns:r="http://schemas.openxmlformats.org/officeDocument/2006/relationships" xmlns:a="http://schemas.openxmlformats.org/drawingml/2006/main" r:embed="Rfd611a6e971e4ada">
             <a:alphaModFix amt="28000"/>
           </a:blip>
           <a:stretch xmlns:a="http://schemas.openxmlformats.org/drawingml/2006/main"/>
@@ -1704,7 +1704,7 @@
           <p:nvPr/>
         </p:nvPicPr>
         <p:blipFill rotWithShape="1">
-          <a:blip xmlns:r="http://schemas.openxmlformats.org/officeDocument/2006/relationships" xmlns:a="http://schemas.openxmlformats.org/drawingml/2006/main" r:embed="Raf7c51a1dcba4065">
+          <a:blip xmlns:r="http://schemas.openxmlformats.org/officeDocument/2006/relationships" xmlns:a="http://schemas.openxmlformats.org/drawingml/2006/main" r:embed="R18343d7dd0524e85">
             <a:alphaModFix amt="28000"/>
           </a:blip>
           <a:srcRect xmlns:a="http://schemas.openxmlformats.org/drawingml/2006/main" l="0" t="0" r="0" b="0"/>
@@ -1984,7 +1984,7 @@
           <p:nvPr/>
         </p:nvPicPr>
         <p:blipFill rotWithShape="1">
-          <a:blip xmlns:r="http://schemas.openxmlformats.org/officeDocument/2006/relationships" xmlns:a="http://schemas.openxmlformats.org/drawingml/2006/main" r:embed="R519ca9d6705e4dfc">
+          <a:blip xmlns:r="http://schemas.openxmlformats.org/officeDocument/2006/relationships" xmlns:a="http://schemas.openxmlformats.org/drawingml/2006/main" r:embed="R1b470f94a9c8446c">
             <a:alphaModFix amt="28000"/>
           </a:blip>
           <a:stretch xmlns:a="http://schemas.openxmlformats.org/drawingml/2006/main"/>
@@ -2259,7 +2259,7 @@
           <p:nvPr/>
         </p:nvPicPr>
         <p:blipFill rotWithShape="1">
-          <a:blip xmlns:r="http://schemas.openxmlformats.org/officeDocument/2006/relationships" xmlns:a="http://schemas.openxmlformats.org/drawingml/2006/main" r:embed="Rce3d8b1bf0b54804">
+          <a:blip xmlns:r="http://schemas.openxmlformats.org/officeDocument/2006/relationships" xmlns:a="http://schemas.openxmlformats.org/drawingml/2006/main" r:embed="R86b10c0441ca4257">
             <a:alphaModFix amt="28000"/>
           </a:blip>
           <a:stretch xmlns:a="http://schemas.openxmlformats.org/drawingml/2006/main"/>
@@ -2683,7 +2683,7 @@
           <p:nvPr/>
         </p:nvPicPr>
         <p:blipFill rotWithShape="1">
-          <a:blip xmlns:r="http://schemas.openxmlformats.org/officeDocument/2006/relationships" xmlns:a="http://schemas.openxmlformats.org/drawingml/2006/main" r:embed="Rbcd2b197a34e4f06">
+          <a:blip xmlns:r="http://schemas.openxmlformats.org/officeDocument/2006/relationships" xmlns:a="http://schemas.openxmlformats.org/drawingml/2006/main" r:embed="R29146c0bd1a44623">
             <a:alphaModFix amt="28000"/>
           </a:blip>
           <a:stretch xmlns:a="http://schemas.openxmlformats.org/drawingml/2006/main"/>
@@ -2824,7 +2824,7 @@
           <p:nvPr/>
         </p:nvPicPr>
         <p:blipFill rotWithShape="1">
-          <a:blip xmlns:r="http://schemas.openxmlformats.org/officeDocument/2006/relationships" xmlns:a="http://schemas.openxmlformats.org/drawingml/2006/main" r:embed="Rfd13408e81c74b27">
+          <a:blip xmlns:r="http://schemas.openxmlformats.org/officeDocument/2006/relationships" xmlns:a="http://schemas.openxmlformats.org/drawingml/2006/main" r:embed="Rc9d31e4f43f14b16">
             <a:alphaModFix amt="28000"/>
           </a:blip>
           <a:stretch xmlns:a="http://schemas.openxmlformats.org/drawingml/2006/main"/>
@@ -2938,7 +2938,7 @@
           <p:nvPr/>
         </p:nvPicPr>
         <p:blipFill rotWithShape="1">
-          <a:blip xmlns:r="http://schemas.openxmlformats.org/officeDocument/2006/relationships" xmlns:a="http://schemas.openxmlformats.org/drawingml/2006/main" r:embed="Rcaebe8edcba44ed3">
+          <a:blip xmlns:r="http://schemas.openxmlformats.org/officeDocument/2006/relationships" xmlns:a="http://schemas.openxmlformats.org/drawingml/2006/main" r:embed="Re645c33fbad744fb">
             <a:alphaModFix amt="28000"/>
           </a:blip>
           <a:stretch xmlns:a="http://schemas.openxmlformats.org/drawingml/2006/main"/>
@@ -3265,7 +3265,7 @@
           <p:nvPr/>
         </p:nvPicPr>
         <p:blipFill rotWithShape="1">
-          <a:blip xmlns:r="http://schemas.openxmlformats.org/officeDocument/2006/relationships" xmlns:a="http://schemas.openxmlformats.org/drawingml/2006/main" r:embed="R7763d272ac8d4670">
+          <a:blip xmlns:r="http://schemas.openxmlformats.org/officeDocument/2006/relationships" xmlns:a="http://schemas.openxmlformats.org/drawingml/2006/main" r:embed="R6a3ae27efb644215">
             <a:alphaModFix amt="28000"/>
           </a:blip>
           <a:stretch xmlns:a="http://schemas.openxmlformats.org/drawingml/2006/main"/>
@@ -3553,7 +3553,7 @@
           <p:nvPr/>
         </p:nvPicPr>
         <p:blipFill rotWithShape="1">
-          <a:blip xmlns:r="http://schemas.openxmlformats.org/officeDocument/2006/relationships" xmlns:a="http://schemas.openxmlformats.org/drawingml/2006/main" r:embed="R9792e5414daf4654">
+          <a:blip xmlns:r="http://schemas.openxmlformats.org/officeDocument/2006/relationships" xmlns:a="http://schemas.openxmlformats.org/drawingml/2006/main" r:embed="R88c5f9b499b64c5f">
             <a:alphaModFix amt="28000"/>
           </a:blip>
           <a:stretch xmlns:a="http://schemas.openxmlformats.org/drawingml/2006/main"/>
@@ -3790,17 +3790,17 @@
   </p:cSld>
   <p:clrMap bg1="lt1" tx1="dk1" bg2="lt2" tx2="dk2" accent1="accent1" accent2="accent2" accent3="accent3" accent4="accent4" accent5="accent5" accent6="accent6" hlink="hlink" folHlink="folHlink"/>
   <p:sldLayoutIdLst>
-    <p:sldLayoutId xmlns:r="http://schemas.openxmlformats.org/officeDocument/2006/relationships" id="2147483649" r:id="R7702c1a9db154e35"/>
-    <p:sldLayoutId xmlns:r="http://schemas.openxmlformats.org/officeDocument/2006/relationships" id="2147483650" r:id="Rb7d1f52177bd4130"/>
-    <p:sldLayoutId xmlns:r="http://schemas.openxmlformats.org/officeDocument/2006/relationships" id="2147483651" r:id="R46be25d57f2543bb"/>
-    <p:sldLayoutId xmlns:r="http://schemas.openxmlformats.org/officeDocument/2006/relationships" id="2147483652" r:id="R3988c9f6bc7640a0"/>
-    <p:sldLayoutId xmlns:r="http://schemas.openxmlformats.org/officeDocument/2006/relationships" id="2147483653" r:id="Rdd71ebde8b7f471d"/>
-    <p:sldLayoutId xmlns:r="http://schemas.openxmlformats.org/officeDocument/2006/relationships" id="2147483654" r:id="R405ac17232654719"/>
-    <p:sldLayoutId xmlns:r="http://schemas.openxmlformats.org/officeDocument/2006/relationships" id="2147483655" r:id="R335b705fa4124f9e"/>
-    <p:sldLayoutId xmlns:r="http://schemas.openxmlformats.org/officeDocument/2006/relationships" id="2147483656" r:id="R03689fe7b0e74413"/>
-    <p:sldLayoutId xmlns:r="http://schemas.openxmlformats.org/officeDocument/2006/relationships" id="2147483657" r:id="R7f31d07205ea4e94"/>
-    <p:sldLayoutId xmlns:r="http://schemas.openxmlformats.org/officeDocument/2006/relationships" id="2147483658" r:id="Re347855d59074637"/>
-    <p:sldLayoutId xmlns:r="http://schemas.openxmlformats.org/officeDocument/2006/relationships" id="2147483659" r:id="Rf0ac240eeeba4c3e"/>
+    <p:sldLayoutId xmlns:r="http://schemas.openxmlformats.org/officeDocument/2006/relationships" id="2147483649" r:id="R9e9f68a0683b425d"/>
+    <p:sldLayoutId xmlns:r="http://schemas.openxmlformats.org/officeDocument/2006/relationships" id="2147483650" r:id="R052c01c331a44b16"/>
+    <p:sldLayoutId xmlns:r="http://schemas.openxmlformats.org/officeDocument/2006/relationships" id="2147483651" r:id="R3553b85dd0e64b1d"/>
+    <p:sldLayoutId xmlns:r="http://schemas.openxmlformats.org/officeDocument/2006/relationships" id="2147483652" r:id="R3767945556d6449e"/>
+    <p:sldLayoutId xmlns:r="http://schemas.openxmlformats.org/officeDocument/2006/relationships" id="2147483653" r:id="Rdf9f02f0dcbc4240"/>
+    <p:sldLayoutId xmlns:r="http://schemas.openxmlformats.org/officeDocument/2006/relationships" id="2147483654" r:id="R4ca20edab82d471d"/>
+    <p:sldLayoutId xmlns:r="http://schemas.openxmlformats.org/officeDocument/2006/relationships" id="2147483655" r:id="R332ef20902f04c2b"/>
+    <p:sldLayoutId xmlns:r="http://schemas.openxmlformats.org/officeDocument/2006/relationships" id="2147483656" r:id="R60a75be03b684de8"/>
+    <p:sldLayoutId xmlns:r="http://schemas.openxmlformats.org/officeDocument/2006/relationships" id="2147483657" r:id="R409f05c94ac04b5d"/>
+    <p:sldLayoutId xmlns:r="http://schemas.openxmlformats.org/officeDocument/2006/relationships" id="2147483658" r:id="Ra967582a5e07469a"/>
+    <p:sldLayoutId xmlns:r="http://schemas.openxmlformats.org/officeDocument/2006/relationships" id="2147483659" r:id="Rcfc1a8f5c98449d5"/>
   </p:sldLayoutIdLst>
   <p:hf hdr="0" ftr="0" dt="0"/>
   <p:txStyles>
